--- a/generated/Tier 1 Broker Scorecards/Taos Global Group Inc_Broker_Scorecard.pptx
+++ b/generated/Tier 1 Broker Scorecards/Taos Global Group Inc_Broker_Scorecard.pptx
@@ -3394,7 +3394,7 @@
                         <a:rPr sz="900">
                           <a:latin typeface="Segoe UI"/>
                         </a:rPr>
-                        <a:t>Tier 1  |  11.27% / 15.00%</a:t>
+                        <a:t>Tier 1  |  10.27% / 15.00%</a:t>
                       </a:r>
                     </a:p>
                   </a:txBody>
@@ -3690,7 +3690,7 @@
                         <a:rPr sz="900">
                           <a:latin typeface="Segoe UI"/>
                         </a:rPr>
-                        <a:t>Fleet Bound Premium: $196,736.20</a:t>
+                        <a:t>Fleet Bound Premium: $202,870.64</a:t>
                       </a:r>
                     </a:p>
                   </a:txBody>
@@ -3727,7 +3727,7 @@
                         <a:rPr sz="900">
                           <a:latin typeface="Segoe UI"/>
                         </a:rPr>
-                        <a:t>Fleet Book %: 77.4%</a:t>
+                        <a:t>Fleet Book %: 79.9%</a:t>
                       </a:r>
                     </a:p>
                   </a:txBody>
@@ -3766,7 +3766,7 @@
                         <a:rPr sz="900">
                           <a:latin typeface="Segoe UI"/>
                         </a:rPr>
-                        <a:t>Non-Fleet Subs: 124  |  Binds: 11</a:t>
+                        <a:t>Non-Fleet Subs: 128  |  Binds: 10</a:t>
                       </a:r>
                     </a:p>
                   </a:txBody>
@@ -3803,7 +3803,7 @@
                         <a:rPr sz="900">
                           <a:latin typeface="Segoe UI"/>
                         </a:rPr>
-                        <a:t>Non-Fleet Bound Premium: $57,285.87</a:t>
+                        <a:t>Non-Fleet Bound Premium: $51,151.43</a:t>
                       </a:r>
                     </a:p>
                   </a:txBody>
@@ -3840,7 +3840,7 @@
                         <a:rPr sz="900">
                           <a:latin typeface="Segoe UI"/>
                         </a:rPr>
-                        <a:t>Non-Fleet Book %: 22.6%</a:t>
+                        <a:t>Non-Fleet Book %: 20.1%</a:t>
                       </a:r>
                     </a:p>
                   </a:txBody>
@@ -4428,7 +4428,7 @@
                           </a:solidFill>
                           <a:latin typeface="Segoe UI"/>
                         </a:rPr>
-                        <a:t>23</a:t>
+                        <a:t>27</a:t>
                       </a:r>
                     </a:p>
                   </a:txBody>
@@ -4707,7 +4707,7 @@
                           </a:solidFill>
                           <a:latin typeface="Segoe UI"/>
                         </a:rPr>
-                        <a:t>17.4%</a:t>
+                        <a:t>11.1%</a:t>
                       </a:r>
                     </a:p>
                   </a:txBody>
@@ -4978,9 +4978,12 @@
                       <a:pPr algn="ctr"/>
                       <a:r>
                         <a:rPr sz="800">
+                          <a:solidFill>
+                            <a:srgbClr val="DC2626"/>
+                          </a:solidFill>
                           <a:latin typeface="Segoe UI"/>
                         </a:rPr>
-                        <a:t>4</a:t>
+                        <a:t>3</a:t>
                       </a:r>
                     </a:p>
                   </a:txBody>

--- a/generated/Tier 1 Broker Scorecards/Taos Global Group Inc_Broker_Scorecard.pptx
+++ b/generated/Tier 1 Broker Scorecards/Taos Global Group Inc_Broker_Scorecard.pptx
@@ -3357,7 +3357,7 @@
                         <a:rPr sz="800">
                           <a:latin typeface="Segoe UI"/>
                         </a:rPr>
-                        <a:t>$1,117,516.16 / $1,165,160.25 / $254,022.07</a:t>
+                        <a:t>$1,117,516.16 / $1,183,657.25 / $272,519.07</a:t>
                       </a:r>
                     </a:p>
                   </a:txBody>
@@ -3394,7 +3394,7 @@
                         <a:rPr sz="900">
                           <a:latin typeface="Segoe UI"/>
                         </a:rPr>
-                        <a:t>Tier 1  |  10.27% / 15.00%</a:t>
+                        <a:t>Tier 1  |  10.20% / 15.00%</a:t>
                       </a:r>
                     </a:p>
                   </a:txBody>
@@ -3431,7 +3431,7 @@
                         <a:rPr sz="900">
                           <a:latin typeface="Segoe UI"/>
                         </a:rPr>
-                        <a:t>$1,564,522.62  (16.2% achieved)</a:t>
+                        <a:t>$1,564,522.62  (17.4% achieved)</a:t>
                       </a:r>
                     </a:p>
                   </a:txBody>
@@ -3653,7 +3653,7 @@
                         <a:rPr sz="900">
                           <a:latin typeface="Segoe UI"/>
                         </a:rPr>
-                        <a:t>Fleet Subs: 18  |  Binds: 5</a:t>
+                        <a:t>Fleet Subs: 18  |  Binds: 4</a:t>
                       </a:r>
                     </a:p>
                   </a:txBody>
@@ -3690,7 +3690,7 @@
                         <a:rPr sz="900">
                           <a:latin typeface="Segoe UI"/>
                         </a:rPr>
-                        <a:t>Fleet Bound Premium: $202,870.64</a:t>
+                        <a:t>Fleet Bound Premium: $193,128.56</a:t>
                       </a:r>
                     </a:p>
                   </a:txBody>
@@ -3727,7 +3727,7 @@
                         <a:rPr sz="900">
                           <a:latin typeface="Segoe UI"/>
                         </a:rPr>
-                        <a:t>Fleet Book %: 79.9%</a:t>
+                        <a:t>Fleet Book %: 70.9%</a:t>
                       </a:r>
                     </a:p>
                   </a:txBody>
@@ -3766,7 +3766,7 @@
                         <a:rPr sz="900">
                           <a:latin typeface="Segoe UI"/>
                         </a:rPr>
-                        <a:t>Non-Fleet Subs: 128  |  Binds: 10</a:t>
+                        <a:t>Non-Fleet Subs: 129  |  Binds: 11</a:t>
                       </a:r>
                     </a:p>
                   </a:txBody>
@@ -3803,7 +3803,7 @@
                         <a:rPr sz="900">
                           <a:latin typeface="Segoe UI"/>
                         </a:rPr>
-                        <a:t>Non-Fleet Bound Premium: $51,151.43</a:t>
+                        <a:t>Non-Fleet Bound Premium: $79,390.51</a:t>
                       </a:r>
                     </a:p>
                   </a:txBody>
@@ -3840,7 +3840,7 @@
                         <a:rPr sz="900">
                           <a:latin typeface="Segoe UI"/>
                         </a:rPr>
-                        <a:t>Non-Fleet Book %: 20.1%</a:t>
+                        <a:t>Non-Fleet Book %: 29.1%</a:t>
                       </a:r>
                     </a:p>
                   </a:txBody>
@@ -4428,7 +4428,7 @@
                           </a:solidFill>
                           <a:latin typeface="Segoe UI"/>
                         </a:rPr>
-                        <a:t>27</a:t>
+                        <a:t>29</a:t>
                       </a:r>
                     </a:p>
                   </a:txBody>
@@ -4707,7 +4707,7 @@
                           </a:solidFill>
                           <a:latin typeface="Segoe UI"/>
                         </a:rPr>
-                        <a:t>11.1%</a:t>
+                        <a:t>13.8%</a:t>
                       </a:r>
                     </a:p>
                   </a:txBody>
@@ -4978,12 +4978,9 @@
                       <a:pPr algn="ctr"/>
                       <a:r>
                         <a:rPr sz="800">
-                          <a:solidFill>
-                            <a:srgbClr val="DC2626"/>
-                          </a:solidFill>
                           <a:latin typeface="Segoe UI"/>
                         </a:rPr>
-                        <a:t>3</a:t>
+                        <a:t>4</a:t>
                       </a:r>
                     </a:p>
                   </a:txBody>
@@ -5259,7 +5256,7 @@
                           </a:solidFill>
                           <a:latin typeface="Segoe UI"/>
                         </a:rPr>
-                        <a:t>$41.2K</a:t>
+                        <a:t>$59.7K</a:t>
                       </a:r>
                     </a:p>
                   </a:txBody>

--- a/generated/Tier 1 Broker Scorecards/Taos Global Group Inc_Broker_Scorecard.pptx
+++ b/generated/Tier 1 Broker Scorecards/Taos Global Group Inc_Broker_Scorecard.pptx
@@ -3357,7 +3357,7 @@
                         <a:rPr sz="800">
                           <a:latin typeface="Segoe UI"/>
                         </a:rPr>
-                        <a:t>$1,117,516.16 / $1,183,657.25 / $272,519.07</a:t>
+                        <a:t>$1,117,516.16 / $1,188,556.10 / $277,417.92</a:t>
                       </a:r>
                     </a:p>
                   </a:txBody>
@@ -3394,7 +3394,7 @@
                         <a:rPr sz="900">
                           <a:latin typeface="Segoe UI"/>
                         </a:rPr>
-                        <a:t>Tier 1  |  10.20% / 15.00%</a:t>
+                        <a:t>Tier 1  |  9.52% / 15.00%</a:t>
                       </a:r>
                     </a:p>
                   </a:txBody>
@@ -3431,7 +3431,7 @@
                         <a:rPr sz="900">
                           <a:latin typeface="Segoe UI"/>
                         </a:rPr>
-                        <a:t>$1,564,522.62  (17.4% achieved)</a:t>
+                        <a:t>$1,564,522.62  (17.7% achieved)</a:t>
                       </a:r>
                     </a:p>
                   </a:txBody>
@@ -3653,7 +3653,7 @@
                         <a:rPr sz="900">
                           <a:latin typeface="Segoe UI"/>
                         </a:rPr>
-                        <a:t>Fleet Subs: 18  |  Binds: 4</a:t>
+                        <a:t>Fleet Subs: 18  |  Binds: 3</a:t>
                       </a:r>
                     </a:p>
                   </a:txBody>
@@ -3690,7 +3690,7 @@
                         <a:rPr sz="900">
                           <a:latin typeface="Segoe UI"/>
                         </a:rPr>
-                        <a:t>Fleet Bound Premium: $193,128.56</a:t>
+                        <a:t>Fleet Bound Premium: $132,529.62</a:t>
                       </a:r>
                     </a:p>
                   </a:txBody>
@@ -3727,7 +3727,7 @@
                         <a:rPr sz="900">
                           <a:latin typeface="Segoe UI"/>
                         </a:rPr>
-                        <a:t>Fleet Book %: 70.9%</a:t>
+                        <a:t>Fleet Book %: 47.8%</a:t>
                       </a:r>
                     </a:p>
                   </a:txBody>
@@ -3803,7 +3803,7 @@
                         <a:rPr sz="900">
                           <a:latin typeface="Segoe UI"/>
                         </a:rPr>
-                        <a:t>Non-Fleet Bound Premium: $79,390.51</a:t>
+                        <a:t>Non-Fleet Bound Premium: $144,888.30</a:t>
                       </a:r>
                     </a:p>
                   </a:txBody>
@@ -3840,7 +3840,7 @@
                         <a:rPr sz="900">
                           <a:latin typeface="Segoe UI"/>
                         </a:rPr>
-                        <a:t>Non-Fleet Book %: 29.1%</a:t>
+                        <a:t>Non-Fleet Book %: 52.2%</a:t>
                       </a:r>
                     </a:p>
                   </a:txBody>
@@ -4707,7 +4707,7 @@
                           </a:solidFill>
                           <a:latin typeface="Segoe UI"/>
                         </a:rPr>
-                        <a:t>13.8%</a:t>
+                        <a:t>10.3%</a:t>
                       </a:r>
                     </a:p>
                   </a:txBody>
@@ -4978,9 +4978,12 @@
                       <a:pPr algn="ctr"/>
                       <a:r>
                         <a:rPr sz="800">
+                          <a:solidFill>
+                            <a:srgbClr val="DC2626"/>
+                          </a:solidFill>
                           <a:latin typeface="Segoe UI"/>
                         </a:rPr>
-                        <a:t>4</a:t>
+                        <a:t>3</a:t>
                       </a:r>
                     </a:p>
                   </a:txBody>
@@ -5256,7 +5259,7 @@
                           </a:solidFill>
                           <a:latin typeface="Segoe UI"/>
                         </a:rPr>
-                        <a:t>$59.7K</a:t>
+                        <a:t>$64.6K</a:t>
                       </a:r>
                     </a:p>
                   </a:txBody>

--- a/generated/Tier 1 Broker Scorecards/Taos Global Group Inc_Broker_Scorecard.pptx
+++ b/generated/Tier 1 Broker Scorecards/Taos Global Group Inc_Broker_Scorecard.pptx
@@ -3357,7 +3357,7 @@
                         <a:rPr sz="800">
                           <a:latin typeface="Segoe UI"/>
                         </a:rPr>
-                        <a:t>$1,117,516.16 / $1,188,556.10 / $277,417.92</a:t>
+                        <a:t>$1,117,516.16 / $1,188,904.69 / $277,766.51</a:t>
                       </a:r>
                     </a:p>
                   </a:txBody>
@@ -3394,7 +3394,7 @@
                         <a:rPr sz="900">
                           <a:latin typeface="Segoe UI"/>
                         </a:rPr>
-                        <a:t>Tier 1  |  9.52% / 15.00%</a:t>
+                        <a:t>Tier 1  |  9.46% / 15.00%</a:t>
                       </a:r>
                     </a:p>
                   </a:txBody>
@@ -3431,7 +3431,7 @@
                         <a:rPr sz="900">
                           <a:latin typeface="Segoe UI"/>
                         </a:rPr>
-                        <a:t>$1,564,522.62  (17.7% achieved)</a:t>
+                        <a:t>$1,564,522.62  (17.8% achieved)</a:t>
                       </a:r>
                     </a:p>
                   </a:txBody>
@@ -3653,7 +3653,7 @@
                         <a:rPr sz="900">
                           <a:latin typeface="Segoe UI"/>
                         </a:rPr>
-                        <a:t>Fleet Subs: 18  |  Binds: 3</a:t>
+                        <a:t>Fleet Subs: 19  |  Binds: 3</a:t>
                       </a:r>
                     </a:p>
                   </a:txBody>
@@ -3690,7 +3690,7 @@
                         <a:rPr sz="900">
                           <a:latin typeface="Segoe UI"/>
                         </a:rPr>
-                        <a:t>Fleet Bound Premium: $132,529.62</a:t>
+                        <a:t>Fleet Bound Premium: $132,696.15</a:t>
                       </a:r>
                     </a:p>
                   </a:txBody>
@@ -3803,7 +3803,7 @@
                         <a:rPr sz="900">
                           <a:latin typeface="Segoe UI"/>
                         </a:rPr>
-                        <a:t>Non-Fleet Bound Premium: $144,888.30</a:t>
+                        <a:t>Non-Fleet Bound Premium: $145,070.36</a:t>
                       </a:r>
                     </a:p>
                   </a:txBody>
@@ -4428,7 +4428,7 @@
                           </a:solidFill>
                           <a:latin typeface="Segoe UI"/>
                         </a:rPr>
-                        <a:t>29</a:t>
+                        <a:t>30</a:t>
                       </a:r>
                     </a:p>
                   </a:txBody>
@@ -4707,7 +4707,7 @@
                           </a:solidFill>
                           <a:latin typeface="Segoe UI"/>
                         </a:rPr>
-                        <a:t>10.3%</a:t>
+                        <a:t>10.0%</a:t>
                       </a:r>
                     </a:p>
                   </a:txBody>
@@ -5259,7 +5259,7 @@
                           </a:solidFill>
                           <a:latin typeface="Segoe UI"/>
                         </a:rPr>
-                        <a:t>$64.6K</a:t>
+                        <a:t>$65.0K</a:t>
                       </a:r>
                     </a:p>
                   </a:txBody>

--- a/generated/Tier 1 Broker Scorecards/Taos Global Group Inc_Broker_Scorecard.pptx
+++ b/generated/Tier 1 Broker Scorecards/Taos Global Group Inc_Broker_Scorecard.pptx
@@ -3357,7 +3357,7 @@
                         <a:rPr sz="800">
                           <a:latin typeface="Segoe UI"/>
                         </a:rPr>
-                        <a:t>$1,117,516.16 / $1,188,904.69 / $277,766.51</a:t>
+                        <a:t>$1,117,516.16 / $1,189,281.89 / $278,143.71</a:t>
                       </a:r>
                     </a:p>
                   </a:txBody>
@@ -3394,7 +3394,7 @@
                         <a:rPr sz="900">
                           <a:latin typeface="Segoe UI"/>
                         </a:rPr>
-                        <a:t>Tier 1  |  9.46% / 15.00%</a:t>
+                        <a:t>Tier 1  |  9.40% / 15.00%</a:t>
                       </a:r>
                     </a:p>
                   </a:txBody>
@@ -3690,7 +3690,7 @@
                         <a:rPr sz="900">
                           <a:latin typeface="Segoe UI"/>
                         </a:rPr>
-                        <a:t>Fleet Bound Premium: $132,696.15</a:t>
+                        <a:t>Fleet Bound Premium: $184,294.92</a:t>
                       </a:r>
                     </a:p>
                   </a:txBody>
@@ -3727,7 +3727,7 @@
                         <a:rPr sz="900">
                           <a:latin typeface="Segoe UI"/>
                         </a:rPr>
-                        <a:t>Fleet Book %: 47.8%</a:t>
+                        <a:t>Fleet Book %: 66.3%</a:t>
                       </a:r>
                     </a:p>
                   </a:txBody>
@@ -3766,7 +3766,7 @@
                         <a:rPr sz="900">
                           <a:latin typeface="Segoe UI"/>
                         </a:rPr>
-                        <a:t>Non-Fleet Subs: 129  |  Binds: 11</a:t>
+                        <a:t>Non-Fleet Subs: 130  |  Binds: 11</a:t>
                       </a:r>
                     </a:p>
                   </a:txBody>
@@ -3803,7 +3803,7 @@
                         <a:rPr sz="900">
                           <a:latin typeface="Segoe UI"/>
                         </a:rPr>
-                        <a:t>Non-Fleet Bound Premium: $145,070.36</a:t>
+                        <a:t>Non-Fleet Bound Premium: $93,848.79</a:t>
                       </a:r>
                     </a:p>
                   </a:txBody>
@@ -3840,7 +3840,7 @@
                         <a:rPr sz="900">
                           <a:latin typeface="Segoe UI"/>
                         </a:rPr>
-                        <a:t>Non-Fleet Book %: 52.2%</a:t>
+                        <a:t>Non-Fleet Book %: 33.7%</a:t>
                       </a:r>
                     </a:p>
                   </a:txBody>
@@ -4428,7 +4428,7 @@
                           </a:solidFill>
                           <a:latin typeface="Segoe UI"/>
                         </a:rPr>
-                        <a:t>30</a:t>
+                        <a:t>32</a:t>
                       </a:r>
                     </a:p>
                   </a:txBody>
@@ -4707,7 +4707,7 @@
                           </a:solidFill>
                           <a:latin typeface="Segoe UI"/>
                         </a:rPr>
-                        <a:t>10.0%</a:t>
+                        <a:t>12.5%</a:t>
                       </a:r>
                     </a:p>
                   </a:txBody>
@@ -4978,12 +4978,9 @@
                       <a:pPr algn="ctr"/>
                       <a:r>
                         <a:rPr sz="800">
-                          <a:solidFill>
-                            <a:srgbClr val="DC2626"/>
-                          </a:solidFill>
                           <a:latin typeface="Segoe UI"/>
                         </a:rPr>
-                        <a:t>3</a:t>
+                        <a:t>4</a:t>
                       </a:r>
                     </a:p>
                   </a:txBody>
@@ -5259,7 +5256,7 @@
                           </a:solidFill>
                           <a:latin typeface="Segoe UI"/>
                         </a:rPr>
-                        <a:t>$65.0K</a:t>
+                        <a:t>$65.3K</a:t>
                       </a:r>
                     </a:p>
                   </a:txBody>

--- a/generated/Tier 1 Broker Scorecards/Taos Global Group Inc_Broker_Scorecard.pptx
+++ b/generated/Tier 1 Broker Scorecards/Taos Global Group Inc_Broker_Scorecard.pptx
@@ -3357,7 +3357,7 @@
                         <a:rPr sz="800">
                           <a:latin typeface="Segoe UI"/>
                         </a:rPr>
-                        <a:t>$1,117,516.16 / $1,189,281.89 / $278,143.71</a:t>
+                        <a:t>$1,117,516.16 / $1,189,401.90 / $278,263.72</a:t>
                       </a:r>
                     </a:p>
                   </a:txBody>
@@ -3394,7 +3394,7 @@
                         <a:rPr sz="900">
                           <a:latin typeface="Segoe UI"/>
                         </a:rPr>
-                        <a:t>Tier 1  |  9.40% / 15.00%</a:t>
+                        <a:t>Tier 1  |  10.00% / 15.00%</a:t>
                       </a:r>
                     </a:p>
                   </a:txBody>
@@ -3690,7 +3690,7 @@
                         <a:rPr sz="900">
                           <a:latin typeface="Segoe UI"/>
                         </a:rPr>
-                        <a:t>Fleet Bound Premium: $184,294.92</a:t>
+                        <a:t>Fleet Bound Premium: $175,081.14</a:t>
                       </a:r>
                     </a:p>
                   </a:txBody>
@@ -3727,7 +3727,7 @@
                         <a:rPr sz="900">
                           <a:latin typeface="Segoe UI"/>
                         </a:rPr>
-                        <a:t>Fleet Book %: 66.3%</a:t>
+                        <a:t>Fleet Book %: 62.9%</a:t>
                       </a:r>
                     </a:p>
                   </a:txBody>
@@ -3766,7 +3766,7 @@
                         <a:rPr sz="900">
                           <a:latin typeface="Segoe UI"/>
                         </a:rPr>
-                        <a:t>Non-Fleet Subs: 130  |  Binds: 11</a:t>
+                        <a:t>Non-Fleet Subs: 131  |  Binds: 12</a:t>
                       </a:r>
                     </a:p>
                   </a:txBody>
@@ -3803,7 +3803,7 @@
                         <a:rPr sz="900">
                           <a:latin typeface="Segoe UI"/>
                         </a:rPr>
-                        <a:t>Non-Fleet Bound Premium: $93,848.79</a:t>
+                        <a:t>Non-Fleet Bound Premium: $103,182.58</a:t>
                       </a:r>
                     </a:p>
                   </a:txBody>
@@ -3840,7 +3840,7 @@
                         <a:rPr sz="900">
                           <a:latin typeface="Segoe UI"/>
                         </a:rPr>
-                        <a:t>Non-Fleet Book %: 33.7%</a:t>
+                        <a:t>Non-Fleet Book %: 37.1%</a:t>
                       </a:r>
                     </a:p>
                   </a:txBody>
@@ -4428,7 +4428,7 @@
                           </a:solidFill>
                           <a:latin typeface="Segoe UI"/>
                         </a:rPr>
-                        <a:t>32</a:t>
+                        <a:t>33</a:t>
                       </a:r>
                     </a:p>
                   </a:txBody>
@@ -4707,7 +4707,7 @@
                           </a:solidFill>
                           <a:latin typeface="Segoe UI"/>
                         </a:rPr>
-                        <a:t>12.5%</a:t>
+                        <a:t>15.2%</a:t>
                       </a:r>
                     </a:p>
                   </a:txBody>
@@ -4978,9 +4978,12 @@
                       <a:pPr algn="ctr"/>
                       <a:r>
                         <a:rPr sz="800">
+                          <a:solidFill>
+                            <a:srgbClr val="059669"/>
+                          </a:solidFill>
                           <a:latin typeface="Segoe UI"/>
                         </a:rPr>
-                        <a:t>4</a:t>
+                        <a:t>5</a:t>
                       </a:r>
                     </a:p>
                   </a:txBody>
@@ -5256,7 +5259,7 @@
                           </a:solidFill>
                           <a:latin typeface="Segoe UI"/>
                         </a:rPr>
-                        <a:t>$65.3K</a:t>
+                        <a:t>$65.5K</a:t>
                       </a:r>
                     </a:p>
                   </a:txBody>

--- a/generated/Tier 1 Broker Scorecards/Taos Global Group Inc_Broker_Scorecard.pptx
+++ b/generated/Tier 1 Broker Scorecards/Taos Global Group Inc_Broker_Scorecard.pptx
@@ -3357,7 +3357,7 @@
                         <a:rPr sz="800">
                           <a:latin typeface="Segoe UI"/>
                         </a:rPr>
-                        <a:t>$1,117,516.16 / $1,189,401.90 / $278,263.72</a:t>
+                        <a:t>$1,117,516.16 / $1,188,976.09 / $277,837.91</a:t>
                       </a:r>
                     </a:p>
                   </a:txBody>
@@ -3394,7 +3394,7 @@
                         <a:rPr sz="900">
                           <a:latin typeface="Segoe UI"/>
                         </a:rPr>
-                        <a:t>Tier 1  |  10.00% / 15.00%</a:t>
+                        <a:t>Tier 1  |  11.33% / 15.00%</a:t>
                       </a:r>
                     </a:p>
                   </a:txBody>
@@ -3653,7 +3653,7 @@
                         <a:rPr sz="900">
                           <a:latin typeface="Segoe UI"/>
                         </a:rPr>
-                        <a:t>Fleet Subs: 19  |  Binds: 3</a:t>
+                        <a:t>Fleet Subs: 19  |  Binds: 4</a:t>
                       </a:r>
                     </a:p>
                   </a:txBody>
@@ -3690,7 +3690,7 @@
                         <a:rPr sz="900">
                           <a:latin typeface="Segoe UI"/>
                         </a:rPr>
-                        <a:t>Fleet Bound Premium: $175,081.14</a:t>
+                        <a:t>Fleet Bound Premium: $174,949.14</a:t>
                       </a:r>
                     </a:p>
                   </a:txBody>
@@ -3727,7 +3727,7 @@
                         <a:rPr sz="900">
                           <a:latin typeface="Segoe UI"/>
                         </a:rPr>
-                        <a:t>Fleet Book %: 62.9%</a:t>
+                        <a:t>Fleet Book %: 63.0%</a:t>
                       </a:r>
                     </a:p>
                   </a:txBody>
@@ -3766,7 +3766,7 @@
                         <a:rPr sz="900">
                           <a:latin typeface="Segoe UI"/>
                         </a:rPr>
-                        <a:t>Non-Fleet Subs: 131  |  Binds: 12</a:t>
+                        <a:t>Non-Fleet Subs: 131  |  Binds: 13</a:t>
                       </a:r>
                     </a:p>
                   </a:txBody>
@@ -3803,7 +3803,7 @@
                         <a:rPr sz="900">
                           <a:latin typeface="Segoe UI"/>
                         </a:rPr>
-                        <a:t>Non-Fleet Bound Premium: $103,182.58</a:t>
+                        <a:t>Non-Fleet Bound Premium: $102,888.77</a:t>
                       </a:r>
                     </a:p>
                   </a:txBody>
@@ -3840,7 +3840,7 @@
                         <a:rPr sz="900">
                           <a:latin typeface="Segoe UI"/>
                         </a:rPr>
-                        <a:t>Non-Fleet Book %: 37.1%</a:t>
+                        <a:t>Non-Fleet Book %: 37.0%</a:t>
                       </a:r>
                     </a:p>
                   </a:txBody>
@@ -4703,11 +4703,11 @@
                       <a:r>
                         <a:rPr sz="800">
                           <a:solidFill>
-                            <a:srgbClr val="DC2626"/>
+                            <a:srgbClr val="059669"/>
                           </a:solidFill>
                           <a:latin typeface="Segoe UI"/>
                         </a:rPr>
-                        <a:t>15.2%</a:t>
+                        <a:t>21.2%</a:t>
                       </a:r>
                     </a:p>
                   </a:txBody>
@@ -4983,7 +4983,7 @@
                           </a:solidFill>
                           <a:latin typeface="Segoe UI"/>
                         </a:rPr>
-                        <a:t>5</a:t>
+                        <a:t>7</a:t>
                       </a:r>
                     </a:p>
                   </a:txBody>
@@ -5259,7 +5259,7 @@
                           </a:solidFill>
                           <a:latin typeface="Segoe UI"/>
                         </a:rPr>
-                        <a:t>$65.5K</a:t>
+                        <a:t>$65.0K</a:t>
                       </a:r>
                     </a:p>
                   </a:txBody>

--- a/generated/Tier 1 Broker Scorecards/Taos Global Group Inc_Broker_Scorecard.pptx
+++ b/generated/Tier 1 Broker Scorecards/Taos Global Group Inc_Broker_Scorecard.pptx
@@ -3394,7 +3394,7 @@
                         <a:rPr sz="900">
                           <a:latin typeface="Segoe UI"/>
                         </a:rPr>
-                        <a:t>Tier 1  |  11.33% / 15.00%</a:t>
+                        <a:t>Tier 1  |  11.26% / 15.00%</a:t>
                       </a:r>
                     </a:p>
                   </a:txBody>
@@ -3766,7 +3766,7 @@
                         <a:rPr sz="900">
                           <a:latin typeface="Segoe UI"/>
                         </a:rPr>
-                        <a:t>Non-Fleet Subs: 131  |  Binds: 13</a:t>
+                        <a:t>Non-Fleet Subs: 132  |  Binds: 13</a:t>
                       </a:r>
                     </a:p>
                   </a:txBody>
@@ -4428,7 +4428,7 @@
                           </a:solidFill>
                           <a:latin typeface="Segoe UI"/>
                         </a:rPr>
-                        <a:t>33</a:t>
+                        <a:t>34</a:t>
                       </a:r>
                     </a:p>
                   </a:txBody>
@@ -4707,7 +4707,7 @@
                           </a:solidFill>
                           <a:latin typeface="Segoe UI"/>
                         </a:rPr>
-                        <a:t>21.2%</a:t>
+                        <a:t>20.6%</a:t>
                       </a:r>
                     </a:p>
                   </a:txBody>

--- a/generated/Tier 1 Broker Scorecards/Taos Global Group Inc_Broker_Scorecard.pptx
+++ b/generated/Tier 1 Broker Scorecards/Taos Global Group Inc_Broker_Scorecard.pptx
@@ -3357,7 +3357,7 @@
                         <a:rPr sz="800">
                           <a:latin typeface="Segoe UI"/>
                         </a:rPr>
-                        <a:t>$1,117,516.16 / $1,188,976.09 / $277,837.91</a:t>
+                        <a:t>$1,117,516.16 / $1,157,604.85 / $353,772.06</a:t>
                       </a:r>
                     </a:p>
                   </a:txBody>
@@ -3431,7 +3431,7 @@
                         <a:rPr sz="900">
                           <a:latin typeface="Segoe UI"/>
                         </a:rPr>
-                        <a:t>$1,564,522.62  (17.8% achieved)</a:t>
+                        <a:t>$1,564,522.62  (22.6% achieved)</a:t>
                       </a:r>
                     </a:p>
                   </a:txBody>
@@ -3690,7 +3690,7 @@
                         <a:rPr sz="900">
                           <a:latin typeface="Segoe UI"/>
                         </a:rPr>
-                        <a:t>Fleet Bound Premium: $174,949.14</a:t>
+                        <a:t>Fleet Bound Premium: $222,763.40</a:t>
                       </a:r>
                     </a:p>
                   </a:txBody>
@@ -3803,7 +3803,7 @@
                         <a:rPr sz="900">
                           <a:latin typeface="Segoe UI"/>
                         </a:rPr>
-                        <a:t>Non-Fleet Bound Premium: $102,888.77</a:t>
+                        <a:t>Non-Fleet Bound Premium: $131,008.66</a:t>
                       </a:r>
                     </a:p>
                   </a:txBody>
